--- a/frontend/demo-assets/demo-export-light-sample-vi.pptx
+++ b/frontend/demo-assets/demo-export-light-sample-vi.pptx
@@ -8,9 +8,12 @@
     <p:sldId id="256" r:id="rId2"/>
     <p:sldId id="257" r:id="rId3"/>
     <p:sldId id="258" r:id="rId4"/>
+    <p:sldId id="259" r:id="rId5"/>
+    <p:sldId id="260" r:id="rId6"/>
+    <p:sldId id="261" r:id="rId7"/>
   </p:sldIdLst>
   <p:notesMasterIdLst>
-    <p:notesMasterId r:id="rId5"/>
+    <p:notesMasterId r:id="rId8"/>
   </p:notesMasterIdLst>
   <p:sldSz cx="12192000" cy="6858000"/>
   <p:notesSz cx="6858000" cy="12192000"/>
@@ -704,6 +707,270 @@
             <a:fld id="{F7021451-1387-4CA6-816F-3879F97B5CBC}" type="slidenum">
               <a:rPr lang="en-US"/>
               <a:t>3</a:t>
+            </a:fld>
+            <a:endParaRPr lang="en-US"/>
+          </a:p>
+        </p:txBody>
+      </p:sp>
+    </p:spTree>
+    <p:extLst>
+      <p:ext uri="{BB962C8B-B14F-4D97-AF65-F5344CB8AC3E}">
+        <p14:creationId xmlns:p14="http://schemas.microsoft.com/office/powerpoint/2010/main" val="1024086991"/>
+      </p:ext>
+    </p:extLst>
+  </p:cSld>
+  <p:clrMapOvr>
+    <a:masterClrMapping/>
+  </p:clrMapOvr>
+</p:notes>
+</file>
+
+<file path=ppt/notesSlides/notesSlide4.xml><?xml version="1.0" encoding="utf-8"?>
+<p:notes xmlns:a="http://schemas.openxmlformats.org/drawingml/2006/main" xmlns:r="http://schemas.openxmlformats.org/officeDocument/2006/relationships" xmlns:p="http://schemas.openxmlformats.org/presentationml/2006/main">
+  <p:cSld>
+    <p:spTree>
+      <p:nvGrpSpPr>
+        <p:cNvPr id="1" name=""/>
+        <p:cNvGrpSpPr/>
+        <p:nvPr/>
+      </p:nvGrpSpPr>
+      <p:grpSpPr>
+        <a:xfrm>
+          <a:off x="0" y="0"/>
+          <a:ext cx="0" cy="0"/>
+          <a:chOff x="0" y="0"/>
+          <a:chExt cx="0" cy="0"/>
+        </a:xfrm>
+      </p:grpSpPr>
+      <p:sp>
+        <p:nvSpPr>
+          <p:cNvPr id="2" name="Slide Image Placeholder 1"/>
+          <p:cNvSpPr>
+            <a:spLocks noGrp="1" noRot="1" noChangeAspect="1"/>
+          </p:cNvSpPr>
+          <p:nvPr>
+            <p:ph type="sldImg"/>
+          </p:nvPr>
+        </p:nvSpPr>
+        <p:spPr/>
+      </p:sp>
+      <p:sp>
+        <p:nvSpPr>
+          <p:cNvPr id="3" name="Notes Placeholder 2"/>
+          <p:cNvSpPr>
+            <a:spLocks noGrp="1"/>
+          </p:cNvSpPr>
+          <p:nvPr>
+            <p:ph type="body" idx="1"/>
+          </p:nvPr>
+        </p:nvSpPr>
+        <p:spPr/>
+        <p:txBody>
+          <a:bodyPr/>
+          <a:lstStyle/>
+          <a:p>
+            <a:r>
+              <a:rPr lang="en-US" dirty="0"/>
+              <a:t/>
+            </a:r>
+            <a:endParaRPr lang="en-US" dirty="0"/>
+          </a:p>
+        </p:txBody>
+      </p:sp>
+      <p:sp>
+        <p:nvSpPr>
+          <p:cNvPr id="4" name="Slide Number Placeholder 3"/>
+          <p:cNvSpPr>
+            <a:spLocks noGrp="1"/>
+          </p:cNvSpPr>
+          <p:nvPr>
+            <p:ph type="sldNum" sz="quarter" idx="10"/>
+          </p:nvPr>
+        </p:nvSpPr>
+        <p:spPr/>
+        <p:txBody>
+          <a:bodyPr/>
+          <a:lstStyle/>
+          <a:p>
+            <a:fld id="{F7021451-1387-4CA6-816F-3879F97B5CBC}" type="slidenum">
+              <a:rPr lang="en-US"/>
+              <a:t>4</a:t>
+            </a:fld>
+            <a:endParaRPr lang="en-US"/>
+          </a:p>
+        </p:txBody>
+      </p:sp>
+    </p:spTree>
+    <p:extLst>
+      <p:ext uri="{BB962C8B-B14F-4D97-AF65-F5344CB8AC3E}">
+        <p14:creationId xmlns:p14="http://schemas.microsoft.com/office/powerpoint/2010/main" val="1024086991"/>
+      </p:ext>
+    </p:extLst>
+  </p:cSld>
+  <p:clrMapOvr>
+    <a:masterClrMapping/>
+  </p:clrMapOvr>
+</p:notes>
+</file>
+
+<file path=ppt/notesSlides/notesSlide5.xml><?xml version="1.0" encoding="utf-8"?>
+<p:notes xmlns:a="http://schemas.openxmlformats.org/drawingml/2006/main" xmlns:r="http://schemas.openxmlformats.org/officeDocument/2006/relationships" xmlns:p="http://schemas.openxmlformats.org/presentationml/2006/main">
+  <p:cSld>
+    <p:spTree>
+      <p:nvGrpSpPr>
+        <p:cNvPr id="1" name=""/>
+        <p:cNvGrpSpPr/>
+        <p:nvPr/>
+      </p:nvGrpSpPr>
+      <p:grpSpPr>
+        <a:xfrm>
+          <a:off x="0" y="0"/>
+          <a:ext cx="0" cy="0"/>
+          <a:chOff x="0" y="0"/>
+          <a:chExt cx="0" cy="0"/>
+        </a:xfrm>
+      </p:grpSpPr>
+      <p:sp>
+        <p:nvSpPr>
+          <p:cNvPr id="2" name="Slide Image Placeholder 1"/>
+          <p:cNvSpPr>
+            <a:spLocks noGrp="1" noRot="1" noChangeAspect="1"/>
+          </p:cNvSpPr>
+          <p:nvPr>
+            <p:ph type="sldImg"/>
+          </p:nvPr>
+        </p:nvSpPr>
+        <p:spPr/>
+      </p:sp>
+      <p:sp>
+        <p:nvSpPr>
+          <p:cNvPr id="3" name="Notes Placeholder 2"/>
+          <p:cNvSpPr>
+            <a:spLocks noGrp="1"/>
+          </p:cNvSpPr>
+          <p:nvPr>
+            <p:ph type="body" idx="1"/>
+          </p:nvPr>
+        </p:nvSpPr>
+        <p:spPr/>
+        <p:txBody>
+          <a:bodyPr/>
+          <a:lstStyle/>
+          <a:p>
+            <a:r>
+              <a:rPr lang="en-US" dirty="0"/>
+              <a:t/>
+            </a:r>
+            <a:endParaRPr lang="en-US" dirty="0"/>
+          </a:p>
+        </p:txBody>
+      </p:sp>
+      <p:sp>
+        <p:nvSpPr>
+          <p:cNvPr id="4" name="Slide Number Placeholder 3"/>
+          <p:cNvSpPr>
+            <a:spLocks noGrp="1"/>
+          </p:cNvSpPr>
+          <p:nvPr>
+            <p:ph type="sldNum" sz="quarter" idx="10"/>
+          </p:nvPr>
+        </p:nvSpPr>
+        <p:spPr/>
+        <p:txBody>
+          <a:bodyPr/>
+          <a:lstStyle/>
+          <a:p>
+            <a:fld id="{F7021451-1387-4CA6-816F-3879F97B5CBC}" type="slidenum">
+              <a:rPr lang="en-US"/>
+              <a:t>5</a:t>
+            </a:fld>
+            <a:endParaRPr lang="en-US"/>
+          </a:p>
+        </p:txBody>
+      </p:sp>
+    </p:spTree>
+    <p:extLst>
+      <p:ext uri="{BB962C8B-B14F-4D97-AF65-F5344CB8AC3E}">
+        <p14:creationId xmlns:p14="http://schemas.microsoft.com/office/powerpoint/2010/main" val="1024086991"/>
+      </p:ext>
+    </p:extLst>
+  </p:cSld>
+  <p:clrMapOvr>
+    <a:masterClrMapping/>
+  </p:clrMapOvr>
+</p:notes>
+</file>
+
+<file path=ppt/notesSlides/notesSlide6.xml><?xml version="1.0" encoding="utf-8"?>
+<p:notes xmlns:a="http://schemas.openxmlformats.org/drawingml/2006/main" xmlns:r="http://schemas.openxmlformats.org/officeDocument/2006/relationships" xmlns:p="http://schemas.openxmlformats.org/presentationml/2006/main">
+  <p:cSld>
+    <p:spTree>
+      <p:nvGrpSpPr>
+        <p:cNvPr id="1" name=""/>
+        <p:cNvGrpSpPr/>
+        <p:nvPr/>
+      </p:nvGrpSpPr>
+      <p:grpSpPr>
+        <a:xfrm>
+          <a:off x="0" y="0"/>
+          <a:ext cx="0" cy="0"/>
+          <a:chOff x="0" y="0"/>
+          <a:chExt cx="0" cy="0"/>
+        </a:xfrm>
+      </p:grpSpPr>
+      <p:sp>
+        <p:nvSpPr>
+          <p:cNvPr id="2" name="Slide Image Placeholder 1"/>
+          <p:cNvSpPr>
+            <a:spLocks noGrp="1" noRot="1" noChangeAspect="1"/>
+          </p:cNvSpPr>
+          <p:nvPr>
+            <p:ph type="sldImg"/>
+          </p:nvPr>
+        </p:nvSpPr>
+        <p:spPr/>
+      </p:sp>
+      <p:sp>
+        <p:nvSpPr>
+          <p:cNvPr id="3" name="Notes Placeholder 2"/>
+          <p:cNvSpPr>
+            <a:spLocks noGrp="1"/>
+          </p:cNvSpPr>
+          <p:nvPr>
+            <p:ph type="body" idx="1"/>
+          </p:nvPr>
+        </p:nvSpPr>
+        <p:spPr/>
+        <p:txBody>
+          <a:bodyPr/>
+          <a:lstStyle/>
+          <a:p>
+            <a:r>
+              <a:rPr lang="en-US" dirty="0"/>
+              <a:t/>
+            </a:r>
+            <a:endParaRPr lang="en-US" dirty="0"/>
+          </a:p>
+        </p:txBody>
+      </p:sp>
+      <p:sp>
+        <p:nvSpPr>
+          <p:cNvPr id="4" name="Slide Number Placeholder 3"/>
+          <p:cNvSpPr>
+            <a:spLocks noGrp="1"/>
+          </p:cNvSpPr>
+          <p:nvPr>
+            <p:ph type="sldNum" sz="quarter" idx="10"/>
+          </p:nvPr>
+        </p:nvSpPr>
+        <p:spPr/>
+        <p:txBody>
+          <a:bodyPr/>
+          <a:lstStyle/>
+          <a:p>
+            <a:fld id="{F7021451-1387-4CA6-816F-3879F97B5CBC}" type="slidenum">
+              <a:rPr lang="en-US"/>
+              <a:t>6</a:t>
             </a:fld>
             <a:endParaRPr lang="en-US"/>
           </a:p>
@@ -1113,7 +1380,7 @@
                 <a:ea typeface="Yu Gothic" pitchFamily="34" charset="-122"/>
                 <a:cs typeface="Yu Gothic" pitchFamily="34" charset="-120"/>
               </a:rPr>
-              <a:t>Báo cáo kiểm toán</a:t>
+              <a:t>Báo cáo Cong</a:t>
             </a:r>
             <a:endParaRPr lang="en-US" sz="1000" dirty="0"/>
           </a:p>
@@ -1152,7 +1419,7 @@
                 <a:ea typeface="Yu Gothic" pitchFamily="34" charset="-122"/>
                 <a:cs typeface="Yu Gothic" pitchFamily="34" charset="-120"/>
               </a:rPr>
-              <a:t>F-101 2026年4月 定期巡回</a:t>
+              <a:t>Số container: TCLU1234567</a:t>
             </a:r>
             <a:endParaRPr lang="en-US" sz="2100" dirty="0"/>
           </a:p>
@@ -1183,15 +1450,15 @@
               <a:buNone/>
             </a:pPr>
             <a:r>
-              <a:rPr lang="en-US" sz="1100" dirty="0">
-                <a:solidFill>
-                  <a:srgbClr val="6B7280"/>
-                </a:solidFill>
-                <a:latin typeface="Yu Gothic" pitchFamily="34" charset="0"/>
-                <a:ea typeface="Yu Gothic" pitchFamily="34" charset="-122"/>
-                <a:cs typeface="Yu Gothic" pitchFamily="34" charset="-120"/>
-              </a:rPr>
-              <a:t>P-001 配管まわり</a:t>
+              <a:rPr lang="en-US" sz="1100" b="1" dirty="0">
+                <a:solidFill>
+                  <a:srgbClr val="06224A"/>
+                </a:solidFill>
+                <a:latin typeface="Yu Gothic" pitchFamily="34" charset="0"/>
+                <a:ea typeface="Yu Gothic" pitchFamily="34" charset="-122"/>
+                <a:cs typeface="Yu Gothic" pitchFamily="34" charset="-120"/>
+              </a:rPr>
+              <a:t>Thẻ: Số container</a:t>
             </a:r>
             <a:endParaRPr lang="en-US" sz="1100" dirty="0"/>
           </a:p>
@@ -1352,7 +1619,7 @@
                 <a:ea typeface="Yu Gothic" pitchFamily="34" charset="-122"/>
                 <a:cs typeface="Yu Gothic" pitchFamily="34" charset="-120"/>
               </a:rPr>
-              <a:t>1. 配管接続部に軽微なにじみあり。次回点検で再確認。</a:t>
+              <a:t>1. Đã xác nhận số container.</a:t>
             </a:r>
             <a:endParaRPr lang="en-US" sz="1000" dirty="0"/>
           </a:p>
@@ -1369,7 +1636,7 @@
                 <a:ea typeface="Yu Gothic" pitchFamily="34" charset="-122"/>
                 <a:cs typeface="Yu Gothic" pitchFamily="34" charset="-120"/>
               </a:rPr>
-              <a:t>2026/5/2 06:39 JST デモ利用者</a:t>
+              <a:t>2026/6/7 06:27 JST Quản trị demo cảng</a:t>
             </a:r>
             <a:endParaRPr lang="en-US" sz="1000" dirty="0"/>
           </a:p>
@@ -1392,7 +1659,7 @@
                 <a:ea typeface="Yu Gothic" pitchFamily="34" charset="-122"/>
                 <a:cs typeface="Yu Gothic" pitchFamily="34" charset="-120"/>
               </a:rPr>
-              <a:t>2. 応急処置は不要。報告書には経過観察で記載予定。</a:t>
+              <a:t>2. Đối chiếu số tại cổng OK.</a:t>
             </a:r>
             <a:endParaRPr lang="en-US" sz="1000" dirty="0"/>
           </a:p>
@@ -1409,7 +1676,7 @@
                 <a:ea typeface="Yu Gothic" pitchFamily="34" charset="-122"/>
                 <a:cs typeface="Yu Gothic" pitchFamily="34" charset="-120"/>
               </a:rPr>
-              <a:t>2026/5/2 07:09 JST 佐藤</a:t>
+              <a:t>2026/6/7 06:57 JST Nhân viên cổng</a:t>
             </a:r>
             <a:endParaRPr lang="en-US" sz="1000" dirty="0"/>
           </a:p>
@@ -1471,7 +1738,7 @@
                 <a:ea typeface="Yu Gothic" pitchFamily="34" charset="-122"/>
                 <a:cs typeface="Yu Gothic" pitchFamily="34" charset="-120"/>
               </a:rPr>
-              <a:t>Gói: BASIC / Đã dùng: 0MB / Giới hạn: 1024MB / 1/3</a:t>
+              <a:t>Gói: BASIC / Đã dùng: 0MB / Giới hạn: 1024MB / 1/6</a:t>
             </a:r>
             <a:endParaRPr lang="en-US" sz="800" dirty="0"/>
           </a:p>
@@ -1569,7 +1836,7 @@
                 <a:ea typeface="Yu Gothic" pitchFamily="34" charset="-122"/>
                 <a:cs typeface="Yu Gothic" pitchFamily="34" charset="-120"/>
               </a:rPr>
-              <a:t>Báo cáo kiểm toán</a:t>
+              <a:t>Báo cáo Cong</a:t>
             </a:r>
             <a:endParaRPr lang="en-US" sz="1000" dirty="0"/>
           </a:p>
@@ -1608,7 +1875,7 @@
                 <a:ea typeface="Yu Gothic" pitchFamily="34" charset="-122"/>
                 <a:cs typeface="Yu Gothic" pitchFamily="34" charset="-120"/>
               </a:rPr>
-              <a:t>F-101 2026年4月 定期巡回</a:t>
+              <a:t>Số container: TCLU1234567</a:t>
             </a:r>
             <a:endParaRPr lang="en-US" sz="2100" dirty="0"/>
           </a:p>
@@ -1639,15 +1906,15 @@
               <a:buNone/>
             </a:pPr>
             <a:r>
-              <a:rPr lang="en-US" sz="1100" dirty="0">
-                <a:solidFill>
-                  <a:srgbClr val="6B7280"/>
-                </a:solidFill>
-                <a:latin typeface="Yu Gothic" pitchFamily="34" charset="0"/>
-                <a:ea typeface="Yu Gothic" pitchFamily="34" charset="-122"/>
-                <a:cs typeface="Yu Gothic" pitchFamily="34" charset="-120"/>
-              </a:rPr>
-              <a:t>P-002 計器表示</a:t>
+              <a:rPr lang="en-US" sz="1100" b="1" dirty="0">
+                <a:solidFill>
+                  <a:srgbClr val="1E90FF"/>
+                </a:solidFill>
+                <a:latin typeface="Yu Gothic" pitchFamily="34" charset="0"/>
+                <a:ea typeface="Yu Gothic" pitchFamily="34" charset="-122"/>
+                <a:cs typeface="Yu Gothic" pitchFamily="34" charset="-120"/>
+              </a:rPr>
+              <a:t>Thẻ: Nhập bãi</a:t>
             </a:r>
             <a:endParaRPr lang="en-US" sz="1100" dirty="0"/>
           </a:p>
@@ -1808,7 +2075,7 @@
                 <a:ea typeface="Yu Gothic" pitchFamily="34" charset="-122"/>
                 <a:cs typeface="Yu Gothic" pitchFamily="34" charset="-120"/>
               </a:rPr>
-              <a:t>1. 計器表示は正常範囲。今回は記録のみ。</a:t>
+              <a:t>1. Đã ghi nhận ngoại quan khi nhập bãi.</a:t>
             </a:r>
             <a:endParaRPr lang="en-US" sz="1000" dirty="0"/>
           </a:p>
@@ -1825,7 +2092,7 @@
                 <a:ea typeface="Yu Gothic" pitchFamily="34" charset="-122"/>
                 <a:cs typeface="Yu Gothic" pitchFamily="34" charset="-120"/>
               </a:rPr>
-              <a:t>2026/5/2 07:29 JST デモ利用者</a:t>
+              <a:t>2026/6/7 07:17 JST Quản trị demo cảng</a:t>
             </a:r>
             <a:endParaRPr lang="en-US" sz="1000" dirty="0"/>
           </a:p>
@@ -1887,7 +2154,7 @@
                 <a:ea typeface="Yu Gothic" pitchFamily="34" charset="-122"/>
                 <a:cs typeface="Yu Gothic" pitchFamily="34" charset="-120"/>
               </a:rPr>
-              <a:t>Gói: BASIC / Đã dùng: 0MB / Giới hạn: 1024MB / 2/3</a:t>
+              <a:t>Gói: BASIC / Đã dùng: 0MB / Giới hạn: 1024MB / 2/6</a:t>
             </a:r>
             <a:endParaRPr lang="en-US" sz="800" dirty="0"/>
           </a:p>
@@ -1985,7 +2252,7 @@
                 <a:ea typeface="Yu Gothic" pitchFamily="34" charset="-122"/>
                 <a:cs typeface="Yu Gothic" pitchFamily="34" charset="-120"/>
               </a:rPr>
-              <a:t>Báo cáo kiểm toán</a:t>
+              <a:t>Báo cáo Cong</a:t>
             </a:r>
             <a:endParaRPr lang="en-US" sz="1000" dirty="0"/>
           </a:p>
@@ -2024,7 +2291,7 @@
                 <a:ea typeface="Yu Gothic" pitchFamily="34" charset="-122"/>
                 <a:cs typeface="Yu Gothic" pitchFamily="34" charset="-120"/>
               </a:rPr>
-              <a:t>F-101 2026年4月 定期巡回</a:t>
+              <a:t>Số container: TCLU1234567</a:t>
             </a:r>
             <a:endParaRPr lang="en-US" sz="2100" dirty="0"/>
           </a:p>
@@ -2055,15 +2322,15 @@
               <a:buNone/>
             </a:pPr>
             <a:r>
-              <a:rPr lang="en-US" sz="1100" dirty="0">
-                <a:solidFill>
-                  <a:srgbClr val="6B7280"/>
-                </a:solidFill>
-                <a:latin typeface="Yu Gothic" pitchFamily="34" charset="0"/>
-                <a:ea typeface="Yu Gothic" pitchFamily="34" charset="-122"/>
-                <a:cs typeface="Yu Gothic" pitchFamily="34" charset="-120"/>
-              </a:rPr>
-              <a:t>P-003 床面状況</a:t>
+              <a:rPr lang="en-US" sz="1100" b="1" dirty="0">
+                <a:solidFill>
+                  <a:srgbClr val="7C4DFF"/>
+                </a:solidFill>
+                <a:latin typeface="Yu Gothic" pitchFamily="34" charset="0"/>
+                <a:ea typeface="Yu Gothic" pitchFamily="34" charset="-122"/>
+                <a:cs typeface="Yu Gothic" pitchFamily="34" charset="-120"/>
+              </a:rPr>
+              <a:t>Thẻ: Seal</a:t>
             </a:r>
             <a:endParaRPr lang="en-US" sz="1100" dirty="0"/>
           </a:p>
@@ -2224,7 +2491,24 @@
                 <a:ea typeface="Yu Gothic" pitchFamily="34" charset="-122"/>
                 <a:cs typeface="Yu Gothic" pitchFamily="34" charset="-120"/>
               </a:rPr>
-              <a:t>Không có bình luận</a:t>
+              <a:t>1. Số seal hiển thị rõ.</a:t>
+            </a:r>
+            <a:endParaRPr lang="en-US" sz="1000" dirty="0"/>
+          </a:p>
+          <a:p>
+            <a:pPr indent="0" marL="0">
+              <a:buNone/>
+            </a:pPr>
+            <a:r>
+              <a:rPr lang="en-US" sz="1000" dirty="0">
+                <a:solidFill>
+                  <a:srgbClr val="333333"/>
+                </a:solidFill>
+                <a:latin typeface="Yu Gothic" pitchFamily="34" charset="0"/>
+                <a:ea typeface="Yu Gothic" pitchFamily="34" charset="-122"/>
+                <a:cs typeface="Yu Gothic" pitchFamily="34" charset="-120"/>
+              </a:rPr>
+              <a:t>2026/6/7 07:37 JST Nhân viên kiểm tra seal</a:t>
             </a:r>
             <a:endParaRPr lang="en-US" sz="1000" dirty="0"/>
           </a:p>
@@ -2286,7 +2570,1255 @@
                 <a:ea typeface="Yu Gothic" pitchFamily="34" charset="-122"/>
                 <a:cs typeface="Yu Gothic" pitchFamily="34" charset="-120"/>
               </a:rPr>
-              <a:t>Gói: BASIC / Đã dùng: 0MB / Giới hạn: 1024MB / 3/3</a:t>
+              <a:t>Gói: BASIC / Đã dùng: 0MB / Giới hạn: 1024MB / 3/6</a:t>
+            </a:r>
+            <a:endParaRPr lang="en-US" sz="800" dirty="0"/>
+          </a:p>
+        </p:txBody>
+      </p:sp>
+    </p:spTree>
+  </p:cSld>
+  <p:clrMapOvr>
+    <a:masterClrMapping/>
+  </p:clrMapOvr>
+</p:sld>
+</file>
+
+<file path=ppt/slides/slide4.xml><?xml version="1.0" encoding="utf-8"?>
+<p:sld xmlns:a="http://schemas.openxmlformats.org/drawingml/2006/main" xmlns:r="http://schemas.openxmlformats.org/officeDocument/2006/relationships" xmlns:p="http://schemas.openxmlformats.org/presentationml/2006/main">
+  <p:cSld name="Slide 4">
+    <p:bg>
+      <p:bgPr>
+        <a:solidFill>
+          <a:srgbClr val="F8FBF6"/>
+        </a:solidFill>
+      </p:bgPr>
+    </p:bg>
+    <p:spTree>
+      <p:nvGrpSpPr>
+        <p:cNvPr id="1" name=""/>
+        <p:cNvGrpSpPr/>
+        <p:nvPr/>
+      </p:nvGrpSpPr>
+      <p:grpSpPr>
+        <a:xfrm>
+          <a:off x="0" y="0"/>
+          <a:ext cx="0" cy="0"/>
+          <a:chOff x="0" y="0"/>
+          <a:chExt cx="0" cy="0"/>
+        </a:xfrm>
+      </p:grpSpPr>
+      <p:sp>
+        <p:nvSpPr>
+          <p:cNvPr id="2" name="Shape 0"/>
+          <p:cNvSpPr/>
+          <p:nvPr/>
+        </p:nvSpPr>
+        <p:spPr>
+          <a:xfrm>
+            <a:off x="502920" y="347472"/>
+            <a:ext cx="1737360" cy="310896"/>
+          </a:xfrm>
+          <a:prstGeom prst="roundRect">
+            <a:avLst>
+              <a:gd name="adj" fmla="val 23529"/>
+            </a:avLst>
+          </a:prstGeom>
+          <a:solidFill>
+            <a:srgbClr val="E8F2E2"/>
+          </a:solidFill>
+          <a:ln w="12700">
+            <a:solidFill>
+              <a:srgbClr val="BFD2B7"/>
+            </a:solidFill>
+            <a:prstDash val="solid"/>
+          </a:ln>
+        </p:spPr>
+      </p:sp>
+      <p:sp>
+        <p:nvSpPr>
+          <p:cNvPr id="3" name="Text 1"/>
+          <p:cNvSpPr/>
+          <p:nvPr/>
+        </p:nvSpPr>
+        <p:spPr>
+          <a:xfrm>
+            <a:off x="749808" y="411480"/>
+            <a:ext cx="1234440" cy="109728"/>
+          </a:xfrm>
+          <a:prstGeom prst="rect">
+            <a:avLst/>
+          </a:prstGeom>
+          <a:noFill/>
+          <a:ln/>
+        </p:spPr>
+        <p:txBody>
+          <a:bodyPr wrap="square" rtlCol="0" anchor="ctr"/>
+          <a:lstStyle/>
+          <a:p>
+            <a:pPr indent="0" marL="0">
+              <a:buNone/>
+            </a:pPr>
+            <a:r>
+              <a:rPr lang="en-US" sz="1000" b="1" dirty="0">
+                <a:solidFill>
+                  <a:srgbClr val="5F8D52"/>
+                </a:solidFill>
+                <a:latin typeface="Yu Gothic" pitchFamily="34" charset="0"/>
+                <a:ea typeface="Yu Gothic" pitchFamily="34" charset="-122"/>
+                <a:cs typeface="Yu Gothic" pitchFamily="34" charset="-120"/>
+              </a:rPr>
+              <a:t>Báo cáo Cong</a:t>
+            </a:r>
+            <a:endParaRPr lang="en-US" sz="1000" dirty="0"/>
+          </a:p>
+        </p:txBody>
+      </p:sp>
+      <p:sp>
+        <p:nvSpPr>
+          <p:cNvPr id="4" name="Text 2"/>
+          <p:cNvSpPr/>
+          <p:nvPr/>
+        </p:nvSpPr>
+        <p:spPr>
+          <a:xfrm>
+            <a:off x="502920" y="822960"/>
+            <a:ext cx="7498080" cy="310896"/>
+          </a:xfrm>
+          <a:prstGeom prst="rect">
+            <a:avLst/>
+          </a:prstGeom>
+          <a:noFill/>
+          <a:ln/>
+        </p:spPr>
+        <p:txBody>
+          <a:bodyPr wrap="square" rtlCol="0" anchor="ctr"/>
+          <a:lstStyle/>
+          <a:p>
+            <a:pPr indent="0" marL="0">
+              <a:buNone/>
+            </a:pPr>
+            <a:r>
+              <a:rPr lang="en-US" sz="2100" b="1" dirty="0">
+                <a:solidFill>
+                  <a:srgbClr val="1F2937"/>
+                </a:solidFill>
+                <a:latin typeface="Yu Gothic" pitchFamily="34" charset="0"/>
+                <a:ea typeface="Yu Gothic" pitchFamily="34" charset="-122"/>
+                <a:cs typeface="Yu Gothic" pitchFamily="34" charset="-120"/>
+              </a:rPr>
+              <a:t>Số container: TCLU1234567</a:t>
+            </a:r>
+            <a:endParaRPr lang="en-US" sz="2100" dirty="0"/>
+          </a:p>
+        </p:txBody>
+      </p:sp>
+      <p:sp>
+        <p:nvSpPr>
+          <p:cNvPr id="5" name="Text 3"/>
+          <p:cNvSpPr/>
+          <p:nvPr/>
+        </p:nvSpPr>
+        <p:spPr>
+          <a:xfrm>
+            <a:off x="502920" y="1124712"/>
+            <a:ext cx="7132320" cy="201168"/>
+          </a:xfrm>
+          <a:prstGeom prst="rect">
+            <a:avLst/>
+          </a:prstGeom>
+          <a:noFill/>
+          <a:ln/>
+        </p:spPr>
+        <p:txBody>
+          <a:bodyPr wrap="square" rtlCol="0" anchor="ctr"/>
+          <a:lstStyle/>
+          <a:p>
+            <a:pPr indent="0" marL="0">
+              <a:buNone/>
+            </a:pPr>
+            <a:r>
+              <a:rPr lang="en-US" sz="1100" b="1" dirty="0">
+                <a:solidFill>
+                  <a:srgbClr val="E53935"/>
+                </a:solidFill>
+                <a:latin typeface="Yu Gothic" pitchFamily="34" charset="0"/>
+                <a:ea typeface="Yu Gothic" pitchFamily="34" charset="-122"/>
+                <a:cs typeface="Yu Gothic" pitchFamily="34" charset="-120"/>
+              </a:rPr>
+              <a:t>Thẻ: Hư hỏng</a:t>
+            </a:r>
+            <a:endParaRPr lang="en-US" sz="1100" dirty="0"/>
+          </a:p>
+        </p:txBody>
+      </p:sp>
+      <p:sp>
+        <p:nvSpPr>
+          <p:cNvPr id="6" name="Shape 4"/>
+          <p:cNvSpPr/>
+          <p:nvPr/>
+        </p:nvSpPr>
+        <p:spPr>
+          <a:xfrm>
+            <a:off x="502920" y="1417320"/>
+            <a:ext cx="6949440" cy="4480560"/>
+          </a:xfrm>
+          <a:prstGeom prst="roundRect">
+            <a:avLst>
+              <a:gd name="adj" fmla="val 1020"/>
+            </a:avLst>
+          </a:prstGeom>
+          <a:solidFill>
+            <a:srgbClr val="FFFFFF"/>
+          </a:solidFill>
+          <a:ln w="12700">
+            <a:solidFill>
+              <a:srgbClr val="D8E0D2"/>
+            </a:solidFill>
+            <a:prstDash val="solid"/>
+          </a:ln>
+        </p:spPr>
+      </p:sp>
+      <p:pic>
+        <p:nvPicPr>
+          <p:cNvPr id="7" name="Image 0" descr="preencoded.png">    </p:cNvPr>
+          <p:cNvPicPr>
+            <a:picLocks noChangeAspect="1"/>
+          </p:cNvPicPr>
+          <p:nvPr/>
+        </p:nvPicPr>
+        <p:blipFill>
+          <a:blip r:embed="rId1">
+            <a:extLst>
+              <a:ext uri="{96DAC541-7B7A-43D3-8B79-37D633B846F1}">
+                <asvg:svgBlip xmlns:asvg="http://schemas.microsoft.com/office/drawing/2016/SVG/main" r:embed="rId2"/>
+              </a:ext>
+            </a:extLst>
+          </a:blip>
+          <a:srcRect l="0" r="0" t="0" b="0"/>
+          <a:stretch/>
+        </p:blipFill>
+        <p:spPr>
+          <a:xfrm>
+            <a:off x="502920" y="1417320"/>
+            <a:ext cx="6949440" cy="4480560"/>
+          </a:xfrm>
+          <a:prstGeom prst="rect">
+            <a:avLst/>
+          </a:prstGeom>
+        </p:spPr>
+      </p:pic>
+      <p:sp>
+        <p:nvSpPr>
+          <p:cNvPr id="8" name="Shape 5"/>
+          <p:cNvSpPr/>
+          <p:nvPr/>
+        </p:nvSpPr>
+        <p:spPr>
+          <a:xfrm>
+            <a:off x="7726680" y="1417320"/>
+            <a:ext cx="3520440" cy="4480560"/>
+          </a:xfrm>
+          <a:prstGeom prst="roundRect">
+            <a:avLst>
+              <a:gd name="adj" fmla="val 1299"/>
+            </a:avLst>
+          </a:prstGeom>
+          <a:solidFill>
+            <a:srgbClr val="FFFFFF"/>
+          </a:solidFill>
+          <a:ln w="12700">
+            <a:solidFill>
+              <a:srgbClr val="D8E0D2"/>
+            </a:solidFill>
+            <a:prstDash val="solid"/>
+          </a:ln>
+        </p:spPr>
+      </p:sp>
+      <p:sp>
+        <p:nvSpPr>
+          <p:cNvPr id="9" name="Text 6"/>
+          <p:cNvSpPr/>
+          <p:nvPr/>
+        </p:nvSpPr>
+        <p:spPr>
+          <a:xfrm>
+            <a:off x="7909560" y="1563624"/>
+            <a:ext cx="1188720" cy="146304"/>
+          </a:xfrm>
+          <a:prstGeom prst="rect">
+            <a:avLst/>
+          </a:prstGeom>
+          <a:noFill/>
+          <a:ln/>
+        </p:spPr>
+        <p:txBody>
+          <a:bodyPr wrap="square" rtlCol="0" anchor="ctr"/>
+          <a:lstStyle/>
+          <a:p>
+            <a:pPr indent="0" marL="0">
+              <a:buNone/>
+            </a:pPr>
+            <a:r>
+              <a:rPr lang="en-US" sz="1100" b="1" dirty="0">
+                <a:solidFill>
+                  <a:srgbClr val="5F8D52"/>
+                </a:solidFill>
+                <a:latin typeface="Yu Gothic" pitchFamily="34" charset="0"/>
+                <a:ea typeface="Yu Gothic" pitchFamily="34" charset="-122"/>
+                <a:cs typeface="Yu Gothic" pitchFamily="34" charset="-120"/>
+              </a:rPr>
+              <a:t>Bình luận</a:t>
+            </a:r>
+            <a:endParaRPr lang="en-US" sz="1100" dirty="0"/>
+          </a:p>
+        </p:txBody>
+      </p:sp>
+      <p:sp>
+        <p:nvSpPr>
+          <p:cNvPr id="10" name="Text 7"/>
+          <p:cNvSpPr/>
+          <p:nvPr/>
+        </p:nvSpPr>
+        <p:spPr>
+          <a:xfrm>
+            <a:off x="7909560" y="1837944"/>
+            <a:ext cx="3154680" cy="3767328"/>
+          </a:xfrm>
+          <a:prstGeom prst="rect">
+            <a:avLst/>
+          </a:prstGeom>
+          <a:noFill/>
+          <a:ln/>
+        </p:spPr>
+        <p:txBody>
+          <a:bodyPr wrap="square" lIns="0" tIns="0" rIns="0" bIns="0" rtlCol="0" anchor="t"/>
+          <a:lstStyle/>
+          <a:p>
+            <a:pPr indent="0" marL="0">
+              <a:buNone/>
+            </a:pPr>
+            <a:r>
+              <a:rPr lang="en-US" sz="1000" dirty="0">
+                <a:solidFill>
+                  <a:srgbClr val="333333"/>
+                </a:solidFill>
+                <a:latin typeface="Yu Gothic" pitchFamily="34" charset="0"/>
+                <a:ea typeface="Yu Gothic" pitchFamily="34" charset="-122"/>
+                <a:cs typeface="Yu Gothic" pitchFamily="34" charset="-120"/>
+              </a:rPr>
+              <a:t>1. Có vết xước ở mặt phải. Đã lưu làm bằng chứng khi nhập bãi.</a:t>
+            </a:r>
+            <a:endParaRPr lang="en-US" sz="1000" dirty="0"/>
+          </a:p>
+          <a:p>
+            <a:pPr indent="0" marL="0">
+              <a:buNone/>
+            </a:pPr>
+            <a:r>
+              <a:rPr lang="en-US" sz="1000" dirty="0">
+                <a:solidFill>
+                  <a:srgbClr val="333333"/>
+                </a:solidFill>
+                <a:latin typeface="Yu Gothic" pitchFamily="34" charset="0"/>
+                <a:ea typeface="Yu Gothic" pitchFamily="34" charset="-122"/>
+                <a:cs typeface="Yu Gothic" pitchFamily="34" charset="-120"/>
+              </a:rPr>
+              <a:t>2026/6/7 07:52 JST Nhân viên kiểm tra hư hỏng</a:t>
+            </a:r>
+            <a:endParaRPr lang="en-US" sz="1000" dirty="0"/>
+          </a:p>
+        </p:txBody>
+      </p:sp>
+      <p:sp>
+        <p:nvSpPr>
+          <p:cNvPr id="11" name="Shape 8"/>
+          <p:cNvSpPr/>
+          <p:nvPr/>
+        </p:nvSpPr>
+        <p:spPr>
+          <a:xfrm>
+            <a:off x="502920" y="6236208"/>
+            <a:ext cx="10241280" cy="0"/>
+          </a:xfrm>
+          <a:prstGeom prst="line">
+            <a:avLst/>
+          </a:prstGeom>
+          <a:noFill/>
+          <a:ln w="12700">
+            <a:solidFill>
+              <a:srgbClr val="D8E0D2"/>
+            </a:solidFill>
+            <a:prstDash val="solid"/>
+          </a:ln>
+        </p:spPr>
+      </p:sp>
+      <p:sp>
+        <p:nvSpPr>
+          <p:cNvPr id="12" name="Text 9"/>
+          <p:cNvSpPr/>
+          <p:nvPr/>
+        </p:nvSpPr>
+        <p:spPr>
+          <a:xfrm>
+            <a:off x="530352" y="6291072"/>
+            <a:ext cx="9875520" cy="146304"/>
+          </a:xfrm>
+          <a:prstGeom prst="rect">
+            <a:avLst/>
+          </a:prstGeom>
+          <a:noFill/>
+          <a:ln/>
+        </p:spPr>
+        <p:txBody>
+          <a:bodyPr wrap="square" rtlCol="0" anchor="ctr"/>
+          <a:lstStyle/>
+          <a:p>
+            <a:pPr indent="0" marL="0">
+              <a:buNone/>
+            </a:pPr>
+            <a:r>
+              <a:rPr lang="en-US" sz="800" dirty="0">
+                <a:solidFill>
+                  <a:srgbClr val="6B7280"/>
+                </a:solidFill>
+                <a:latin typeface="Yu Gothic" pitchFamily="34" charset="0"/>
+                <a:ea typeface="Yu Gothic" pitchFamily="34" charset="-122"/>
+                <a:cs typeface="Yu Gothic" pitchFamily="34" charset="-120"/>
+              </a:rPr>
+              <a:t>Gói: BASIC / Đã dùng: 0MB / Giới hạn: 1024MB / 4/6</a:t>
+            </a:r>
+            <a:endParaRPr lang="en-US" sz="800" dirty="0"/>
+          </a:p>
+        </p:txBody>
+      </p:sp>
+    </p:spTree>
+  </p:cSld>
+  <p:clrMapOvr>
+    <a:masterClrMapping/>
+  </p:clrMapOvr>
+</p:sld>
+</file>
+
+<file path=ppt/slides/slide5.xml><?xml version="1.0" encoding="utf-8"?>
+<p:sld xmlns:a="http://schemas.openxmlformats.org/drawingml/2006/main" xmlns:r="http://schemas.openxmlformats.org/officeDocument/2006/relationships" xmlns:p="http://schemas.openxmlformats.org/presentationml/2006/main">
+  <p:cSld name="Slide 5">
+    <p:bg>
+      <p:bgPr>
+        <a:solidFill>
+          <a:srgbClr val="F8FBF6"/>
+        </a:solidFill>
+      </p:bgPr>
+    </p:bg>
+    <p:spTree>
+      <p:nvGrpSpPr>
+        <p:cNvPr id="1" name=""/>
+        <p:cNvGrpSpPr/>
+        <p:nvPr/>
+      </p:nvGrpSpPr>
+      <p:grpSpPr>
+        <a:xfrm>
+          <a:off x="0" y="0"/>
+          <a:ext cx="0" cy="0"/>
+          <a:chOff x="0" y="0"/>
+          <a:chExt cx="0" cy="0"/>
+        </a:xfrm>
+      </p:grpSpPr>
+      <p:sp>
+        <p:nvSpPr>
+          <p:cNvPr id="2" name="Shape 0"/>
+          <p:cNvSpPr/>
+          <p:nvPr/>
+        </p:nvSpPr>
+        <p:spPr>
+          <a:xfrm>
+            <a:off x="502920" y="347472"/>
+            <a:ext cx="1737360" cy="310896"/>
+          </a:xfrm>
+          <a:prstGeom prst="roundRect">
+            <a:avLst>
+              <a:gd name="adj" fmla="val 23529"/>
+            </a:avLst>
+          </a:prstGeom>
+          <a:solidFill>
+            <a:srgbClr val="E8F2E2"/>
+          </a:solidFill>
+          <a:ln w="12700">
+            <a:solidFill>
+              <a:srgbClr val="BFD2B7"/>
+            </a:solidFill>
+            <a:prstDash val="solid"/>
+          </a:ln>
+        </p:spPr>
+      </p:sp>
+      <p:sp>
+        <p:nvSpPr>
+          <p:cNvPr id="3" name="Text 1"/>
+          <p:cNvSpPr/>
+          <p:nvPr/>
+        </p:nvSpPr>
+        <p:spPr>
+          <a:xfrm>
+            <a:off x="749808" y="411480"/>
+            <a:ext cx="1234440" cy="109728"/>
+          </a:xfrm>
+          <a:prstGeom prst="rect">
+            <a:avLst/>
+          </a:prstGeom>
+          <a:noFill/>
+          <a:ln/>
+        </p:spPr>
+        <p:txBody>
+          <a:bodyPr wrap="square" rtlCol="0" anchor="ctr"/>
+          <a:lstStyle/>
+          <a:p>
+            <a:pPr indent="0" marL="0">
+              <a:buNone/>
+            </a:pPr>
+            <a:r>
+              <a:rPr lang="en-US" sz="1000" b="1" dirty="0">
+                <a:solidFill>
+                  <a:srgbClr val="5F8D52"/>
+                </a:solidFill>
+                <a:latin typeface="Yu Gothic" pitchFamily="34" charset="0"/>
+                <a:ea typeface="Yu Gothic" pitchFamily="34" charset="-122"/>
+                <a:cs typeface="Yu Gothic" pitchFamily="34" charset="-120"/>
+              </a:rPr>
+              <a:t>Báo cáo Cong</a:t>
+            </a:r>
+            <a:endParaRPr lang="en-US" sz="1000" dirty="0"/>
+          </a:p>
+        </p:txBody>
+      </p:sp>
+      <p:sp>
+        <p:nvSpPr>
+          <p:cNvPr id="4" name="Text 2"/>
+          <p:cNvSpPr/>
+          <p:nvPr/>
+        </p:nvSpPr>
+        <p:spPr>
+          <a:xfrm>
+            <a:off x="502920" y="822960"/>
+            <a:ext cx="7498080" cy="310896"/>
+          </a:xfrm>
+          <a:prstGeom prst="rect">
+            <a:avLst/>
+          </a:prstGeom>
+          <a:noFill/>
+          <a:ln/>
+        </p:spPr>
+        <p:txBody>
+          <a:bodyPr wrap="square" rtlCol="0" anchor="ctr"/>
+          <a:lstStyle/>
+          <a:p>
+            <a:pPr indent="0" marL="0">
+              <a:buNone/>
+            </a:pPr>
+            <a:r>
+              <a:rPr lang="en-US" sz="2100" b="1" dirty="0">
+                <a:solidFill>
+                  <a:srgbClr val="1F2937"/>
+                </a:solidFill>
+                <a:latin typeface="Yu Gothic" pitchFamily="34" charset="0"/>
+                <a:ea typeface="Yu Gothic" pitchFamily="34" charset="-122"/>
+                <a:cs typeface="Yu Gothic" pitchFamily="34" charset="-120"/>
+              </a:rPr>
+              <a:t>Số container: TCLU1234567</a:t>
+            </a:r>
+            <a:endParaRPr lang="en-US" sz="2100" dirty="0"/>
+          </a:p>
+        </p:txBody>
+      </p:sp>
+      <p:sp>
+        <p:nvSpPr>
+          <p:cNvPr id="5" name="Text 3"/>
+          <p:cNvSpPr/>
+          <p:nvPr/>
+        </p:nvSpPr>
+        <p:spPr>
+          <a:xfrm>
+            <a:off x="502920" y="1124712"/>
+            <a:ext cx="7132320" cy="201168"/>
+          </a:xfrm>
+          <a:prstGeom prst="rect">
+            <a:avLst/>
+          </a:prstGeom>
+          <a:noFill/>
+          <a:ln/>
+        </p:spPr>
+        <p:txBody>
+          <a:bodyPr wrap="square" rtlCol="0" anchor="ctr"/>
+          <a:lstStyle/>
+          <a:p>
+            <a:pPr indent="0" marL="0">
+              <a:buNone/>
+            </a:pPr>
+            <a:r>
+              <a:rPr lang="en-US" sz="1100" b="1" dirty="0">
+                <a:solidFill>
+                  <a:srgbClr val="2E7D32"/>
+                </a:solidFill>
+                <a:latin typeface="Yu Gothic" pitchFamily="34" charset="0"/>
+                <a:ea typeface="Yu Gothic" pitchFamily="34" charset="-122"/>
+                <a:cs typeface="Yu Gothic" pitchFamily="34" charset="-120"/>
+              </a:rPr>
+              <a:t>Thẻ: Xuất bãi</a:t>
+            </a:r>
+            <a:endParaRPr lang="en-US" sz="1100" dirty="0"/>
+          </a:p>
+        </p:txBody>
+      </p:sp>
+      <p:sp>
+        <p:nvSpPr>
+          <p:cNvPr id="6" name="Shape 4"/>
+          <p:cNvSpPr/>
+          <p:nvPr/>
+        </p:nvSpPr>
+        <p:spPr>
+          <a:xfrm>
+            <a:off x="502920" y="1417320"/>
+            <a:ext cx="6949440" cy="4480560"/>
+          </a:xfrm>
+          <a:prstGeom prst="roundRect">
+            <a:avLst>
+              <a:gd name="adj" fmla="val 1020"/>
+            </a:avLst>
+          </a:prstGeom>
+          <a:solidFill>
+            <a:srgbClr val="FFFFFF"/>
+          </a:solidFill>
+          <a:ln w="12700">
+            <a:solidFill>
+              <a:srgbClr val="D8E0D2"/>
+            </a:solidFill>
+            <a:prstDash val="solid"/>
+          </a:ln>
+        </p:spPr>
+      </p:sp>
+      <p:pic>
+        <p:nvPicPr>
+          <p:cNvPr id="7" name="Image 0" descr="preencoded.png">    </p:cNvPr>
+          <p:cNvPicPr>
+            <a:picLocks noChangeAspect="1"/>
+          </p:cNvPicPr>
+          <p:nvPr/>
+        </p:nvPicPr>
+        <p:blipFill>
+          <a:blip r:embed="rId1">
+            <a:extLst>
+              <a:ext uri="{96DAC541-7B7A-43D3-8B79-37D633B846F1}">
+                <asvg:svgBlip xmlns:asvg="http://schemas.microsoft.com/office/drawing/2016/SVG/main" r:embed="rId2"/>
+              </a:ext>
+            </a:extLst>
+          </a:blip>
+          <a:srcRect l="0" r="0" t="0" b="0"/>
+          <a:stretch/>
+        </p:blipFill>
+        <p:spPr>
+          <a:xfrm>
+            <a:off x="502920" y="1417320"/>
+            <a:ext cx="6949440" cy="4480560"/>
+          </a:xfrm>
+          <a:prstGeom prst="rect">
+            <a:avLst/>
+          </a:prstGeom>
+        </p:spPr>
+      </p:pic>
+      <p:sp>
+        <p:nvSpPr>
+          <p:cNvPr id="8" name="Shape 5"/>
+          <p:cNvSpPr/>
+          <p:nvPr/>
+        </p:nvSpPr>
+        <p:spPr>
+          <a:xfrm>
+            <a:off x="7726680" y="1417320"/>
+            <a:ext cx="3520440" cy="4480560"/>
+          </a:xfrm>
+          <a:prstGeom prst="roundRect">
+            <a:avLst>
+              <a:gd name="adj" fmla="val 1299"/>
+            </a:avLst>
+          </a:prstGeom>
+          <a:solidFill>
+            <a:srgbClr val="FFFFFF"/>
+          </a:solidFill>
+          <a:ln w="12700">
+            <a:solidFill>
+              <a:srgbClr val="D8E0D2"/>
+            </a:solidFill>
+            <a:prstDash val="solid"/>
+          </a:ln>
+        </p:spPr>
+      </p:sp>
+      <p:sp>
+        <p:nvSpPr>
+          <p:cNvPr id="9" name="Text 6"/>
+          <p:cNvSpPr/>
+          <p:nvPr/>
+        </p:nvSpPr>
+        <p:spPr>
+          <a:xfrm>
+            <a:off x="7909560" y="1563624"/>
+            <a:ext cx="1188720" cy="146304"/>
+          </a:xfrm>
+          <a:prstGeom prst="rect">
+            <a:avLst/>
+          </a:prstGeom>
+          <a:noFill/>
+          <a:ln/>
+        </p:spPr>
+        <p:txBody>
+          <a:bodyPr wrap="square" rtlCol="0" anchor="ctr"/>
+          <a:lstStyle/>
+          <a:p>
+            <a:pPr indent="0" marL="0">
+              <a:buNone/>
+            </a:pPr>
+            <a:r>
+              <a:rPr lang="en-US" sz="1100" b="1" dirty="0">
+                <a:solidFill>
+                  <a:srgbClr val="5F8D52"/>
+                </a:solidFill>
+                <a:latin typeface="Yu Gothic" pitchFamily="34" charset="0"/>
+                <a:ea typeface="Yu Gothic" pitchFamily="34" charset="-122"/>
+                <a:cs typeface="Yu Gothic" pitchFamily="34" charset="-120"/>
+              </a:rPr>
+              <a:t>Bình luận</a:t>
+            </a:r>
+            <a:endParaRPr lang="en-US" sz="1100" dirty="0"/>
+          </a:p>
+        </p:txBody>
+      </p:sp>
+      <p:sp>
+        <p:nvSpPr>
+          <p:cNvPr id="10" name="Text 7"/>
+          <p:cNvSpPr/>
+          <p:nvPr/>
+        </p:nvSpPr>
+        <p:spPr>
+          <a:xfrm>
+            <a:off x="7909560" y="1837944"/>
+            <a:ext cx="3154680" cy="3767328"/>
+          </a:xfrm>
+          <a:prstGeom prst="rect">
+            <a:avLst/>
+          </a:prstGeom>
+          <a:noFill/>
+          <a:ln/>
+        </p:spPr>
+        <p:txBody>
+          <a:bodyPr wrap="square" lIns="0" tIns="0" rIns="0" bIns="0" rtlCol="0" anchor="t"/>
+          <a:lstStyle/>
+          <a:p>
+            <a:pPr indent="0" marL="0">
+              <a:buNone/>
+            </a:pPr>
+            <a:r>
+              <a:rPr lang="en-US" sz="1000" dirty="0">
+                <a:solidFill>
+                  <a:srgbClr val="333333"/>
+                </a:solidFill>
+                <a:latin typeface="Yu Gothic" pitchFamily="34" charset="0"/>
+                <a:ea typeface="Yu Gothic" pitchFamily="34" charset="-122"/>
+                <a:cs typeface="Yu Gothic" pitchFamily="34" charset="-120"/>
+              </a:rPr>
+              <a:t>1. Đã xác nhận ngoại quan trước khi xuất bãi.</a:t>
+            </a:r>
+            <a:endParaRPr lang="en-US" sz="1000" dirty="0"/>
+          </a:p>
+          <a:p>
+            <a:pPr indent="0" marL="0">
+              <a:buNone/>
+            </a:pPr>
+            <a:r>
+              <a:rPr lang="en-US" sz="1000" dirty="0">
+                <a:solidFill>
+                  <a:srgbClr val="333333"/>
+                </a:solidFill>
+                <a:latin typeface="Yu Gothic" pitchFamily="34" charset="0"/>
+                <a:ea typeface="Yu Gothic" pitchFamily="34" charset="-122"/>
+                <a:cs typeface="Yu Gothic" pitchFamily="34" charset="-120"/>
+              </a:rPr>
+              <a:t>2026/6/7 08:12 JST Nhân viên bãi</a:t>
+            </a:r>
+            <a:endParaRPr lang="en-US" sz="1000" dirty="0"/>
+          </a:p>
+        </p:txBody>
+      </p:sp>
+      <p:sp>
+        <p:nvSpPr>
+          <p:cNvPr id="11" name="Shape 8"/>
+          <p:cNvSpPr/>
+          <p:nvPr/>
+        </p:nvSpPr>
+        <p:spPr>
+          <a:xfrm>
+            <a:off x="502920" y="6236208"/>
+            <a:ext cx="10241280" cy="0"/>
+          </a:xfrm>
+          <a:prstGeom prst="line">
+            <a:avLst/>
+          </a:prstGeom>
+          <a:noFill/>
+          <a:ln w="12700">
+            <a:solidFill>
+              <a:srgbClr val="D8E0D2"/>
+            </a:solidFill>
+            <a:prstDash val="solid"/>
+          </a:ln>
+        </p:spPr>
+      </p:sp>
+      <p:sp>
+        <p:nvSpPr>
+          <p:cNvPr id="12" name="Text 9"/>
+          <p:cNvSpPr/>
+          <p:nvPr/>
+        </p:nvSpPr>
+        <p:spPr>
+          <a:xfrm>
+            <a:off x="530352" y="6291072"/>
+            <a:ext cx="9875520" cy="146304"/>
+          </a:xfrm>
+          <a:prstGeom prst="rect">
+            <a:avLst/>
+          </a:prstGeom>
+          <a:noFill/>
+          <a:ln/>
+        </p:spPr>
+        <p:txBody>
+          <a:bodyPr wrap="square" rtlCol="0" anchor="ctr"/>
+          <a:lstStyle/>
+          <a:p>
+            <a:pPr indent="0" marL="0">
+              <a:buNone/>
+            </a:pPr>
+            <a:r>
+              <a:rPr lang="en-US" sz="800" dirty="0">
+                <a:solidFill>
+                  <a:srgbClr val="6B7280"/>
+                </a:solidFill>
+                <a:latin typeface="Yu Gothic" pitchFamily="34" charset="0"/>
+                <a:ea typeface="Yu Gothic" pitchFamily="34" charset="-122"/>
+                <a:cs typeface="Yu Gothic" pitchFamily="34" charset="-120"/>
+              </a:rPr>
+              <a:t>Gói: BASIC / Đã dùng: 0MB / Giới hạn: 1024MB / 5/6</a:t>
+            </a:r>
+            <a:endParaRPr lang="en-US" sz="800" dirty="0"/>
+          </a:p>
+        </p:txBody>
+      </p:sp>
+    </p:spTree>
+  </p:cSld>
+  <p:clrMapOvr>
+    <a:masterClrMapping/>
+  </p:clrMapOvr>
+</p:sld>
+</file>
+
+<file path=ppt/slides/slide6.xml><?xml version="1.0" encoding="utf-8"?>
+<p:sld xmlns:a="http://schemas.openxmlformats.org/drawingml/2006/main" xmlns:r="http://schemas.openxmlformats.org/officeDocument/2006/relationships" xmlns:p="http://schemas.openxmlformats.org/presentationml/2006/main">
+  <p:cSld name="Slide 6">
+    <p:bg>
+      <p:bgPr>
+        <a:solidFill>
+          <a:srgbClr val="F8FBF6"/>
+        </a:solidFill>
+      </p:bgPr>
+    </p:bg>
+    <p:spTree>
+      <p:nvGrpSpPr>
+        <p:cNvPr id="1" name=""/>
+        <p:cNvGrpSpPr/>
+        <p:nvPr/>
+      </p:nvGrpSpPr>
+      <p:grpSpPr>
+        <a:xfrm>
+          <a:off x="0" y="0"/>
+          <a:ext cx="0" cy="0"/>
+          <a:chOff x="0" y="0"/>
+          <a:chExt cx="0" cy="0"/>
+        </a:xfrm>
+      </p:grpSpPr>
+      <p:sp>
+        <p:nvSpPr>
+          <p:cNvPr id="2" name="Shape 0"/>
+          <p:cNvSpPr/>
+          <p:nvPr/>
+        </p:nvSpPr>
+        <p:spPr>
+          <a:xfrm>
+            <a:off x="502920" y="347472"/>
+            <a:ext cx="1737360" cy="310896"/>
+          </a:xfrm>
+          <a:prstGeom prst="roundRect">
+            <a:avLst>
+              <a:gd name="adj" fmla="val 23529"/>
+            </a:avLst>
+          </a:prstGeom>
+          <a:solidFill>
+            <a:srgbClr val="E8F2E2"/>
+          </a:solidFill>
+          <a:ln w="12700">
+            <a:solidFill>
+              <a:srgbClr val="BFD2B7"/>
+            </a:solidFill>
+            <a:prstDash val="solid"/>
+          </a:ln>
+        </p:spPr>
+      </p:sp>
+      <p:sp>
+        <p:nvSpPr>
+          <p:cNvPr id="3" name="Text 1"/>
+          <p:cNvSpPr/>
+          <p:nvPr/>
+        </p:nvSpPr>
+        <p:spPr>
+          <a:xfrm>
+            <a:off x="749808" y="411480"/>
+            <a:ext cx="1234440" cy="109728"/>
+          </a:xfrm>
+          <a:prstGeom prst="rect">
+            <a:avLst/>
+          </a:prstGeom>
+          <a:noFill/>
+          <a:ln/>
+        </p:spPr>
+        <p:txBody>
+          <a:bodyPr wrap="square" rtlCol="0" anchor="ctr"/>
+          <a:lstStyle/>
+          <a:p>
+            <a:pPr indent="0" marL="0">
+              <a:buNone/>
+            </a:pPr>
+            <a:r>
+              <a:rPr lang="en-US" sz="1000" b="1" dirty="0">
+                <a:solidFill>
+                  <a:srgbClr val="5F8D52"/>
+                </a:solidFill>
+                <a:latin typeface="Yu Gothic" pitchFamily="34" charset="0"/>
+                <a:ea typeface="Yu Gothic" pitchFamily="34" charset="-122"/>
+                <a:cs typeface="Yu Gothic" pitchFamily="34" charset="-120"/>
+              </a:rPr>
+              <a:t>Báo cáo Cong</a:t>
+            </a:r>
+            <a:endParaRPr lang="en-US" sz="1000" dirty="0"/>
+          </a:p>
+        </p:txBody>
+      </p:sp>
+      <p:sp>
+        <p:nvSpPr>
+          <p:cNvPr id="4" name="Text 2"/>
+          <p:cNvSpPr/>
+          <p:nvPr/>
+        </p:nvSpPr>
+        <p:spPr>
+          <a:xfrm>
+            <a:off x="502920" y="822960"/>
+            <a:ext cx="7498080" cy="310896"/>
+          </a:xfrm>
+          <a:prstGeom prst="rect">
+            <a:avLst/>
+          </a:prstGeom>
+          <a:noFill/>
+          <a:ln/>
+        </p:spPr>
+        <p:txBody>
+          <a:bodyPr wrap="square" rtlCol="0" anchor="ctr"/>
+          <a:lstStyle/>
+          <a:p>
+            <a:pPr indent="0" marL="0">
+              <a:buNone/>
+            </a:pPr>
+            <a:r>
+              <a:rPr lang="en-US" sz="2100" b="1" dirty="0">
+                <a:solidFill>
+                  <a:srgbClr val="1F2937"/>
+                </a:solidFill>
+                <a:latin typeface="Yu Gothic" pitchFamily="34" charset="0"/>
+                <a:ea typeface="Yu Gothic" pitchFamily="34" charset="-122"/>
+                <a:cs typeface="Yu Gothic" pitchFamily="34" charset="-120"/>
+              </a:rPr>
+              <a:t>Số container: TCLU1234567</a:t>
+            </a:r>
+            <a:endParaRPr lang="en-US" sz="2100" dirty="0"/>
+          </a:p>
+        </p:txBody>
+      </p:sp>
+      <p:sp>
+        <p:nvSpPr>
+          <p:cNvPr id="5" name="Text 3"/>
+          <p:cNvSpPr/>
+          <p:nvPr/>
+        </p:nvSpPr>
+        <p:spPr>
+          <a:xfrm>
+            <a:off x="502920" y="1124712"/>
+            <a:ext cx="7132320" cy="201168"/>
+          </a:xfrm>
+          <a:prstGeom prst="rect">
+            <a:avLst/>
+          </a:prstGeom>
+          <a:noFill/>
+          <a:ln/>
+        </p:spPr>
+        <p:txBody>
+          <a:bodyPr wrap="square" rtlCol="0" anchor="ctr"/>
+          <a:lstStyle/>
+          <a:p>
+            <a:pPr indent="0" marL="0">
+              <a:buNone/>
+            </a:pPr>
+            <a:r>
+              <a:rPr lang="en-US" sz="1100" b="1" dirty="0">
+                <a:solidFill>
+                  <a:srgbClr val="607D8B"/>
+                </a:solidFill>
+                <a:latin typeface="Yu Gothic" pitchFamily="34" charset="0"/>
+                <a:ea typeface="Yu Gothic" pitchFamily="34" charset="-122"/>
+                <a:cs typeface="Yu Gothic" pitchFamily="34" charset="-120"/>
+              </a:rPr>
+              <a:t>Thẻ: Khác</a:t>
+            </a:r>
+            <a:endParaRPr lang="en-US" sz="1100" dirty="0"/>
+          </a:p>
+        </p:txBody>
+      </p:sp>
+      <p:sp>
+        <p:nvSpPr>
+          <p:cNvPr id="6" name="Shape 4"/>
+          <p:cNvSpPr/>
+          <p:nvPr/>
+        </p:nvSpPr>
+        <p:spPr>
+          <a:xfrm>
+            <a:off x="502920" y="1417320"/>
+            <a:ext cx="6949440" cy="4480560"/>
+          </a:xfrm>
+          <a:prstGeom prst="roundRect">
+            <a:avLst>
+              <a:gd name="adj" fmla="val 1020"/>
+            </a:avLst>
+          </a:prstGeom>
+          <a:solidFill>
+            <a:srgbClr val="FFFFFF"/>
+          </a:solidFill>
+          <a:ln w="12700">
+            <a:solidFill>
+              <a:srgbClr val="D8E0D2"/>
+            </a:solidFill>
+            <a:prstDash val="solid"/>
+          </a:ln>
+        </p:spPr>
+      </p:sp>
+      <p:pic>
+        <p:nvPicPr>
+          <p:cNvPr id="7" name="Image 0" descr="preencoded.png">    </p:cNvPr>
+          <p:cNvPicPr>
+            <a:picLocks noChangeAspect="1"/>
+          </p:cNvPicPr>
+          <p:nvPr/>
+        </p:nvPicPr>
+        <p:blipFill>
+          <a:blip r:embed="rId1">
+            <a:extLst>
+              <a:ext uri="{96DAC541-7B7A-43D3-8B79-37D633B846F1}">
+                <asvg:svgBlip xmlns:asvg="http://schemas.microsoft.com/office/drawing/2016/SVG/main" r:embed="rId2"/>
+              </a:ext>
+            </a:extLst>
+          </a:blip>
+          <a:srcRect l="0" r="0" t="0" b="0"/>
+          <a:stretch/>
+        </p:blipFill>
+        <p:spPr>
+          <a:xfrm>
+            <a:off x="502920" y="1417320"/>
+            <a:ext cx="6949440" cy="4480560"/>
+          </a:xfrm>
+          <a:prstGeom prst="rect">
+            <a:avLst/>
+          </a:prstGeom>
+        </p:spPr>
+      </p:pic>
+      <p:sp>
+        <p:nvSpPr>
+          <p:cNvPr id="8" name="Shape 5"/>
+          <p:cNvSpPr/>
+          <p:nvPr/>
+        </p:nvSpPr>
+        <p:spPr>
+          <a:xfrm>
+            <a:off x="7726680" y="1417320"/>
+            <a:ext cx="3520440" cy="4480560"/>
+          </a:xfrm>
+          <a:prstGeom prst="roundRect">
+            <a:avLst>
+              <a:gd name="adj" fmla="val 1299"/>
+            </a:avLst>
+          </a:prstGeom>
+          <a:solidFill>
+            <a:srgbClr val="FFFFFF"/>
+          </a:solidFill>
+          <a:ln w="12700">
+            <a:solidFill>
+              <a:srgbClr val="D8E0D2"/>
+            </a:solidFill>
+            <a:prstDash val="solid"/>
+          </a:ln>
+        </p:spPr>
+      </p:sp>
+      <p:sp>
+        <p:nvSpPr>
+          <p:cNvPr id="9" name="Text 6"/>
+          <p:cNvSpPr/>
+          <p:nvPr/>
+        </p:nvSpPr>
+        <p:spPr>
+          <a:xfrm>
+            <a:off x="7909560" y="1563624"/>
+            <a:ext cx="1188720" cy="146304"/>
+          </a:xfrm>
+          <a:prstGeom prst="rect">
+            <a:avLst/>
+          </a:prstGeom>
+          <a:noFill/>
+          <a:ln/>
+        </p:spPr>
+        <p:txBody>
+          <a:bodyPr wrap="square" rtlCol="0" anchor="ctr"/>
+          <a:lstStyle/>
+          <a:p>
+            <a:pPr indent="0" marL="0">
+              <a:buNone/>
+            </a:pPr>
+            <a:r>
+              <a:rPr lang="en-US" sz="1100" b="1" dirty="0">
+                <a:solidFill>
+                  <a:srgbClr val="5F8D52"/>
+                </a:solidFill>
+                <a:latin typeface="Yu Gothic" pitchFamily="34" charset="0"/>
+                <a:ea typeface="Yu Gothic" pitchFamily="34" charset="-122"/>
+                <a:cs typeface="Yu Gothic" pitchFamily="34" charset="-120"/>
+              </a:rPr>
+              <a:t>Bình luận</a:t>
+            </a:r>
+            <a:endParaRPr lang="en-US" sz="1100" dirty="0"/>
+          </a:p>
+        </p:txBody>
+      </p:sp>
+      <p:sp>
+        <p:nvSpPr>
+          <p:cNvPr id="10" name="Text 7"/>
+          <p:cNvSpPr/>
+          <p:nvPr/>
+        </p:nvSpPr>
+        <p:spPr>
+          <a:xfrm>
+            <a:off x="7909560" y="1837944"/>
+            <a:ext cx="3154680" cy="3767328"/>
+          </a:xfrm>
+          <a:prstGeom prst="rect">
+            <a:avLst/>
+          </a:prstGeom>
+          <a:noFill/>
+          <a:ln/>
+        </p:spPr>
+        <p:txBody>
+          <a:bodyPr wrap="square" lIns="0" tIns="0" rIns="0" bIns="0" rtlCol="0" anchor="t"/>
+          <a:lstStyle/>
+          <a:p>
+            <a:pPr indent="0" marL="0">
+              <a:buNone/>
+            </a:pPr>
+            <a:r>
+              <a:rPr lang="en-US" sz="1000" dirty="0">
+                <a:solidFill>
+                  <a:srgbClr val="333333"/>
+                </a:solidFill>
+                <a:latin typeface="Yu Gothic" pitchFamily="34" charset="0"/>
+                <a:ea typeface="Yu Gothic" pitchFamily="34" charset="-122"/>
+                <a:cs typeface="Yu Gothic" pitchFamily="34" charset="-120"/>
+              </a:rPr>
+              <a:t>1. Ảnh bổ sung để liên hệ tài xế.</a:t>
+            </a:r>
+            <a:endParaRPr lang="en-US" sz="1000" dirty="0"/>
+          </a:p>
+          <a:p>
+            <a:pPr indent="0" marL="0">
+              <a:buNone/>
+            </a:pPr>
+            <a:r>
+              <a:rPr lang="en-US" sz="1000" dirty="0">
+                <a:solidFill>
+                  <a:srgbClr val="333333"/>
+                </a:solidFill>
+                <a:latin typeface="Yu Gothic" pitchFamily="34" charset="0"/>
+                <a:ea typeface="Yu Gothic" pitchFamily="34" charset="-122"/>
+                <a:cs typeface="Yu Gothic" pitchFamily="34" charset="-120"/>
+              </a:rPr>
+              <a:t>2026/6/7 08:27 JST Người kiểm tra văn phòng</a:t>
+            </a:r>
+            <a:endParaRPr lang="en-US" sz="1000" dirty="0"/>
+          </a:p>
+        </p:txBody>
+      </p:sp>
+      <p:sp>
+        <p:nvSpPr>
+          <p:cNvPr id="11" name="Shape 8"/>
+          <p:cNvSpPr/>
+          <p:nvPr/>
+        </p:nvSpPr>
+        <p:spPr>
+          <a:xfrm>
+            <a:off x="502920" y="6236208"/>
+            <a:ext cx="10241280" cy="0"/>
+          </a:xfrm>
+          <a:prstGeom prst="line">
+            <a:avLst/>
+          </a:prstGeom>
+          <a:noFill/>
+          <a:ln w="12700">
+            <a:solidFill>
+              <a:srgbClr val="D8E0D2"/>
+            </a:solidFill>
+            <a:prstDash val="solid"/>
+          </a:ln>
+        </p:spPr>
+      </p:sp>
+      <p:sp>
+        <p:nvSpPr>
+          <p:cNvPr id="12" name="Text 9"/>
+          <p:cNvSpPr/>
+          <p:nvPr/>
+        </p:nvSpPr>
+        <p:spPr>
+          <a:xfrm>
+            <a:off x="530352" y="6291072"/>
+            <a:ext cx="9875520" cy="146304"/>
+          </a:xfrm>
+          <a:prstGeom prst="rect">
+            <a:avLst/>
+          </a:prstGeom>
+          <a:noFill/>
+          <a:ln/>
+        </p:spPr>
+        <p:txBody>
+          <a:bodyPr wrap="square" rtlCol="0" anchor="ctr"/>
+          <a:lstStyle/>
+          <a:p>
+            <a:pPr indent="0" marL="0">
+              <a:buNone/>
+            </a:pPr>
+            <a:r>
+              <a:rPr lang="en-US" sz="800" dirty="0">
+                <a:solidFill>
+                  <a:srgbClr val="6B7280"/>
+                </a:solidFill>
+                <a:latin typeface="Yu Gothic" pitchFamily="34" charset="0"/>
+                <a:ea typeface="Yu Gothic" pitchFamily="34" charset="-122"/>
+                <a:cs typeface="Yu Gothic" pitchFamily="34" charset="-120"/>
+              </a:rPr>
+              <a:t>Gói: BASIC / Đã dùng: 0MB / Giới hạn: 1024MB / 6/6</a:t>
             </a:r>
             <a:endParaRPr lang="en-US" sz="800" dirty="0"/>
           </a:p>
